--- a/Topic_D/Exam_Practice/TD-L09_Writing_Workshop_Applications_and_Interviews.pptx
+++ b/Topic_D/Exam_Practice/TD-L09_Writing_Workshop_Applications_and_Interviews.pptx
@@ -784,7 +784,11 @@
           <a:lstStyle/>
           <a:p>
             <a:r>
-              <a:rPr lang="en-US" dirty="0"/>
+              <a:rPr lang="ar-SA" dirty="0">
+                <a:latin typeface="Amiri" pitchFamily="2" charset="-78"/>
+                <a:ea typeface="Amiri" pitchFamily="2" charset="-78"/>
+                <a:cs typeface="Amiri" pitchFamily="2" charset="-78"/>
+              </a:rPr>
               <a:t>Q3 (3 min to choose and read). Title (أ) suits Core and Develop; title (ب) suits Stretch.</a:t>
             </a:r>
             <a:endParaRPr lang="en-US" dirty="0"/>
@@ -1403,7 +1407,11 @@
           <a:lstStyle/>
           <a:p>
             <a:r>
-              <a:rPr lang="en-US" dirty="0"/>
+              <a:rPr lang="ar-SA" dirty="0">
+                <a:latin typeface="Amiri" pitchFamily="2" charset="-78"/>
+                <a:ea typeface="Amiri" pitchFamily="2" charset="-78"/>
+                <a:cs typeface="Amiri" pitchFamily="2" charset="-78"/>
+              </a:rPr>
               <a:t>WELCOME (1 min) — while students join.
 • Greet each student by name as they arrive: السَّلَامُ عَلَيْكُمْ. Take the register (Pastoral Tracker: attendance 0/1).
 • 2-MINUTE CHECK-IN (SEND training): a private chat to any student who seemed unsettled last lesson — “Are you okay today? 👍 / 👎”.
@@ -1936,7 +1944,11 @@
           <a:lstStyle/>
           <a:p>
             <a:r>
-              <a:rPr lang="en-US" dirty="0"/>
+              <a:rPr lang="ar-SA" dirty="0">
+                <a:latin typeface="Amiri" pitchFamily="2" charset="-78"/>
+                <a:ea typeface="Amiri" pitchFamily="2" charset="-78"/>
+                <a:cs typeface="Amiri" pitchFamily="2" charset="-78"/>
+              </a:rPr>
               <a:t>Question words: لِأَيِّ (for which) · مَنْ (who) · مَا صِفَاتُكَ (your qualities) · السَّابِقَةُ (previous — PAST) · اسْأَلْ (ask!).</a:t>
             </a:r>
             <a:endParaRPr lang="en-US" dirty="0"/>
@@ -2508,6 +2520,7 @@
                   <a:srgbClr val="D4AF37"/>
                 </a:solidFill>
                 <a:latin typeface="Amiri" pitchFamily="2" charset="-78"/>
+                <a:ea typeface="Amiri" pitchFamily="2" charset="-78"/>
                 <a:cs typeface="Amiri" pitchFamily="2" charset="-78"/>
               </a:rPr>
               <a:t>م</a:t>
@@ -2714,6 +2727,7 @@
                   <a:srgbClr val="D4AF37"/>
                 </a:solidFill>
                 <a:latin typeface="Amiri" pitchFamily="2" charset="-78"/>
+                <a:ea typeface="Amiri" pitchFamily="2" charset="-78"/>
                 <a:cs typeface="Amiri" pitchFamily="2" charset="-78"/>
               </a:rPr>
               <a:t>وَرْشَةُ الكِتَابَةِ — الطَّلَبَاتُ وَالمُقَابَلَاتُ</a:t>
@@ -3171,6 +3185,7 @@
                   <a:srgbClr val="D4AF37"/>
                 </a:solidFill>
                 <a:latin typeface="Amiri" pitchFamily="2" charset="-78"/>
+                <a:ea typeface="Amiri" pitchFamily="2" charset="-78"/>
                 <a:cs typeface="Amiri" pitchFamily="2" charset="-78"/>
               </a:rPr>
               <a:t>م</a:t>
@@ -3491,6 +3506,7 @@
                   <a:srgbClr val="8A6D1E"/>
                 </a:solidFill>
                 <a:latin typeface="Amiri" pitchFamily="2" charset="-78"/>
+                <a:ea typeface="Amiri" pitchFamily="2" charset="-78"/>
                 <a:cs typeface="Amiri" pitchFamily="2" charset="-78"/>
               </a:rPr>
               <a:t>نَمُوذَجُ الإِجَابَةِ</a:t>
@@ -3604,6 +3620,7 @@
                   <a:srgbClr val="1F2A37"/>
                 </a:solidFill>
                 <a:latin typeface="Amiri" pitchFamily="2" charset="-78"/>
+                <a:ea typeface="Amiri" pitchFamily="2" charset="-78"/>
                 <a:cs typeface="Amiri" pitchFamily="2" charset="-78"/>
               </a:rPr>
               <a:t>إِلَى مُدِيرِ مَكْتَبَةِ المَدِينَةِ،</a:t>
@@ -3623,6 +3640,7 @@
                   <a:srgbClr val="1F2A37"/>
                 </a:solidFill>
                 <a:latin typeface="Amiri" pitchFamily="2" charset="-78"/>
+                <a:ea typeface="Amiri" pitchFamily="2" charset="-78"/>
                 <a:cs typeface="Amiri" pitchFamily="2" charset="-78"/>
               </a:rPr>
               <a:t>أَوَدُّ أَنْ أَتَقَدَّمَ لِوَظِيفَةِ المُسَاعِدِ الَّتِي رَأَيْتُهَا فِي إِعْلَانِكُمْ. اسْمِي سَامِي، وَعُمْرِي سَبْعَ عَشْرَةَ سَنَةً، وَأَدْرُسُ فِي الصَّفِّ الثَّانِي عَشَرَ. أُحِبُّ الكُتُبَ كَثِيرًا، وَأَنَا مُنَظَّمٌ وَصَبُورٌ. فِي الصَّيْفِ المَاضِي عَمِلْتُ فِي مَكْتَبَةِ المَدْرَسَةِ، وَكُنْتُ أُرَتِّبُ الكُتُبَ وَأُسَاعِدُ الطُّلَّابَ فِي البَحْثِ عَنْهَا. أُرِيدُ هٰذِهِ الوَظِيفَةَ لِأَنَّهَا تُنَاسِبُ دِرَاسَتِي، وَسَأَتَعَلَّمُ مِنْهَا كَثِيرًا. هَلْ يُمْكِنُنِي أَنْ أَسْأَلَ عَنْ سَاعَاتِ العَمَلِ؟ سَأُرْسِلُ لَكُمْ سِيرَتِي الذَّاتِيَّةَ مَعَ هٰذِهِ الرِّسَالَةِ.</a:t>
@@ -3642,6 +3660,7 @@
                   <a:srgbClr val="1F2A37"/>
                 </a:solidFill>
                 <a:latin typeface="Amiri" pitchFamily="2" charset="-78"/>
+                <a:ea typeface="Amiri" pitchFamily="2" charset="-78"/>
                 <a:cs typeface="Amiri" pitchFamily="2" charset="-78"/>
               </a:rPr>
               <a:t>مَعَ الشُّكْرِ،</a:t>
@@ -3661,6 +3680,7 @@
                   <a:srgbClr val="1F2A37"/>
                 </a:solidFill>
                 <a:latin typeface="Amiri" pitchFamily="2" charset="-78"/>
+                <a:ea typeface="Amiri" pitchFamily="2" charset="-78"/>
                 <a:cs typeface="Amiri" pitchFamily="2" charset="-78"/>
               </a:rPr>
               <a:t>سَامِي أَحْمَدُ</a:t>
@@ -3824,11 +3844,12 @@
               <a:buNone/>
             </a:pPr>
             <a:r>
-              <a:rPr lang="en-US" sz="950" b="1" dirty="0">
+              <a:rPr lang="ar-SA" sz="950" b="1" dirty="0">
                 <a:solidFill>
                   <a:srgbClr val="FFFFFF"/>
                 </a:solidFill>
                 <a:latin typeface="Calibri" pitchFamily="34" charset="0"/>
+                <a:ea typeface="Amiri" pitchFamily="2" charset="-78"/>
                 <a:cs typeface="Amiri" pitchFamily="2" charset="-78"/>
               </a:rPr>
               <a:t>أَوَدُّ أَنْ أَتَقَدَّمَ</a:t>
@@ -3889,11 +3910,12 @@
               <a:buNone/>
             </a:pPr>
             <a:r>
-              <a:rPr lang="en-US" sz="950" b="1" dirty="0">
+              <a:rPr lang="ar-SA" sz="950" b="1" dirty="0">
                 <a:solidFill>
                   <a:srgbClr val="FFFFFF"/>
                 </a:solidFill>
                 <a:latin typeface="Calibri" pitchFamily="34" charset="0"/>
+                <a:ea typeface="Amiri" pitchFamily="2" charset="-78"/>
                 <a:cs typeface="Amiri" pitchFamily="2" charset="-78"/>
               </a:rPr>
               <a:t>الَّتِي رَأَيْتُهَا</a:t>
@@ -3954,11 +3976,12 @@
               <a:buNone/>
             </a:pPr>
             <a:r>
-              <a:rPr lang="en-US" sz="950" b="1" dirty="0">
+              <a:rPr lang="ar-SA" sz="950" b="1" dirty="0">
                 <a:solidFill>
                   <a:srgbClr val="FFFFFF"/>
                 </a:solidFill>
                 <a:latin typeface="Calibri" pitchFamily="34" charset="0"/>
+                <a:ea typeface="Amiri" pitchFamily="2" charset="-78"/>
                 <a:cs typeface="Amiri" pitchFamily="2" charset="-78"/>
               </a:rPr>
               <a:t>البَحْثِ عَنْهَا</a:t>
@@ -4019,11 +4042,12 @@
               <a:buNone/>
             </a:pPr>
             <a:r>
-              <a:rPr lang="en-US" sz="950" b="1" dirty="0">
+              <a:rPr lang="ar-SA" sz="950" b="1" dirty="0">
                 <a:solidFill>
                   <a:srgbClr val="FFFFFF"/>
                 </a:solidFill>
                 <a:latin typeface="Calibri" pitchFamily="34" charset="0"/>
+                <a:ea typeface="Amiri" pitchFamily="2" charset="-78"/>
                 <a:cs typeface="Amiri" pitchFamily="2" charset="-78"/>
               </a:rPr>
               <a:t>هَلْ يُمْكِنُنِي أَنْ أَسْأَلَ</a:t>
@@ -4157,6 +4181,7 @@
                   <a:srgbClr val="D4AF37"/>
                 </a:solidFill>
                 <a:latin typeface="Amiri" pitchFamily="2" charset="-78"/>
+                <a:ea typeface="Amiri" pitchFamily="2" charset="-78"/>
                 <a:cs typeface="Amiri" pitchFamily="2" charset="-78"/>
               </a:rPr>
               <a:t>م</a:t>
@@ -4477,6 +4502,7 @@
                   <a:srgbClr val="8A6D1E"/>
                 </a:solidFill>
                 <a:latin typeface="Amiri" pitchFamily="2" charset="-78"/>
+                <a:ea typeface="Amiri" pitchFamily="2" charset="-78"/>
                 <a:cs typeface="Amiri" pitchFamily="2" charset="-78"/>
               </a:rPr>
               <a:t>نَمُوذَجُ الإِجَابَةِ</a:t>
@@ -4590,6 +4616,7 @@
                   <a:srgbClr val="1F2A37"/>
                 </a:solidFill>
                 <a:latin typeface="Amiri" pitchFamily="2" charset="-78"/>
+                <a:ea typeface="Amiri" pitchFamily="2" charset="-78"/>
                 <a:cs typeface="Amiri" pitchFamily="2" charset="-78"/>
               </a:rPr>
               <a:t>حَضْرَةَ مُدِيرِ مَكْتَبَةِ المَدِينَةِ المُحْتَرَمِ،</a:t>
@@ -4609,6 +4636,7 @@
                   <a:srgbClr val="1F2A37"/>
                 </a:solidFill>
                 <a:latin typeface="Amiri" pitchFamily="2" charset="-78"/>
+                <a:ea typeface="Amiri" pitchFamily="2" charset="-78"/>
                 <a:cs typeface="Amiri" pitchFamily="2" charset="-78"/>
               </a:rPr>
               <a:t>يَسُرُّنِي أَنْ أَتَقَدَّمَ لِوَظِيفَةِ المُسَاعِدِ الَّتِي نَشَرْتُمُوهَا عَلَى مَوْقِعِكُمْ هٰذَا الأُسْبُوعَ. فَأَنَا طَالِبٌ فِي الصَّفِّ الثَّانِي عَشَرَ، شَغُوفٌ بِالقِرَاءَةِ، وَأَتَمَيَّزُ بِالتَّنْظِيمِ وَالدِّقَّةِ. وَقَدْ عَمِلْتُ الصَّيْفَ المَاضِي مُتَطَوِّعًا فِي مَكْتَبَةِ مَدْرَسَتِي، حَيْثُ أَعَدْتُ تَصْنِيفَ قِسْمِ الرِّوَايَاتِ كُلِّهِ، وَنَظَّمْتُ نَادِيًا لِلْقِرَاءَةِ وَأَدَرْتُهُ أُسْبُوعِيًّا. وَأَرَى أَنَّ هٰذِهِ الوَظِيفَةَ فُرْصَةٌ لِأُطَوِّرَ مَهَارَاتِي فِي التَّعَامُلِ مَعَ الجُمْهُورِ. وَأَوَدُّ أَنْ أَسْأَلَ: هَلْ يُمْكِنُ أَنْ تَكُونَ سَاعَاتُ العَمَلِ مَرِنَةً فِي فَتْرَةِ الامْتِحَانَاتِ؟ تَجِدُونَ مُرْفَقًا سِيرَتِي الذَّاتِيَّةَ وَتَوْصِيَةً مِنْ أَمِينَةِ المَكْتَبَةِ.</a:t>
@@ -4628,6 +4656,7 @@
                   <a:srgbClr val="1F2A37"/>
                 </a:solidFill>
                 <a:latin typeface="Amiri" pitchFamily="2" charset="-78"/>
+                <a:ea typeface="Amiri" pitchFamily="2" charset="-78"/>
                 <a:cs typeface="Amiri" pitchFamily="2" charset="-78"/>
               </a:rPr>
               <a:t>وَتَفَضَّلُوا بِقَبُولِ فَائِقِ الاحْتِرَامِ،</a:t>
@@ -4647,6 +4676,7 @@
                   <a:srgbClr val="1F2A37"/>
                 </a:solidFill>
                 <a:latin typeface="Amiri" pitchFamily="2" charset="-78"/>
+                <a:ea typeface="Amiri" pitchFamily="2" charset="-78"/>
                 <a:cs typeface="Amiri" pitchFamily="2" charset="-78"/>
               </a:rPr>
               <a:t>سَامِي أَحْمَدُ</a:t>
@@ -4810,11 +4840,12 @@
               <a:buNone/>
             </a:pPr>
             <a:r>
-              <a:rPr lang="en-US" sz="950" b="1" dirty="0">
+              <a:rPr lang="ar-SA" sz="950" b="1" dirty="0">
                 <a:solidFill>
                   <a:srgbClr val="FFFFFF"/>
                 </a:solidFill>
                 <a:latin typeface="Calibri" pitchFamily="34" charset="0"/>
+                <a:ea typeface="Amiri" pitchFamily="2" charset="-78"/>
                 <a:cs typeface="Amiri" pitchFamily="2" charset="-78"/>
               </a:rPr>
               <a:t>يَسُرُّنِي أَنْ</a:t>
@@ -4875,11 +4906,12 @@
               <a:buNone/>
             </a:pPr>
             <a:r>
-              <a:rPr lang="en-US" sz="950" b="1" dirty="0">
+              <a:rPr lang="ar-SA" sz="950" b="1" dirty="0">
                 <a:solidFill>
                   <a:srgbClr val="FFFFFF"/>
                 </a:solidFill>
                 <a:latin typeface="Calibri" pitchFamily="34" charset="0"/>
+                <a:ea typeface="Amiri" pitchFamily="2" charset="-78"/>
                 <a:cs typeface="Amiri" pitchFamily="2" charset="-78"/>
               </a:rPr>
               <a:t>نَشَرْتُمُوهَا</a:t>
@@ -4940,11 +4972,12 @@
               <a:buNone/>
             </a:pPr>
             <a:r>
-              <a:rPr lang="en-US" sz="950" b="1" dirty="0">
+              <a:rPr lang="ar-SA" sz="950" b="1" dirty="0">
                 <a:solidFill>
                   <a:srgbClr val="FFFFFF"/>
                 </a:solidFill>
                 <a:latin typeface="Calibri" pitchFamily="34" charset="0"/>
+                <a:ea typeface="Amiri" pitchFamily="2" charset="-78"/>
                 <a:cs typeface="Amiri" pitchFamily="2" charset="-78"/>
               </a:rPr>
               <a:t>وَأَدَرْتُهُ</a:t>
@@ -5005,11 +5038,12 @@
               <a:buNone/>
             </a:pPr>
             <a:r>
-              <a:rPr lang="en-US" sz="950" b="1" dirty="0">
+              <a:rPr lang="ar-SA" sz="950" b="1" dirty="0">
                 <a:solidFill>
                   <a:srgbClr val="FFFFFF"/>
                 </a:solidFill>
                 <a:latin typeface="Calibri" pitchFamily="34" charset="0"/>
+                <a:ea typeface="Amiri" pitchFamily="2" charset="-78"/>
                 <a:cs typeface="Amiri" pitchFamily="2" charset="-78"/>
               </a:rPr>
               <a:t>أَوَدُّ أَنْ أَسْأَلَ</a:t>
@@ -5143,6 +5177,7 @@
                   <a:srgbClr val="D4AF37"/>
                 </a:solidFill>
                 <a:latin typeface="Amiri" pitchFamily="2" charset="-78"/>
+                <a:ea typeface="Amiri" pitchFamily="2" charset="-78"/>
                 <a:cs typeface="Amiri" pitchFamily="2" charset="-78"/>
               </a:rPr>
               <a:t>م</a:t>
@@ -5463,6 +5498,7 @@
                   <a:srgbClr val="8A6D1E"/>
                 </a:solidFill>
                 <a:latin typeface="Amiri" pitchFamily="2" charset="-78"/>
+                <a:ea typeface="Amiri" pitchFamily="2" charset="-78"/>
                 <a:cs typeface="Amiri" pitchFamily="2" charset="-78"/>
               </a:rPr>
               <a:t>اخْتَرْ عُنْوَانًا وَاحِدًا</a:t>
@@ -5743,6 +5779,7 @@
                   <a:srgbClr val="1B3B6F"/>
                 </a:solidFill>
                 <a:latin typeface="Amiri" pitchFamily="2" charset="-78"/>
+                <a:ea typeface="Amiri" pitchFamily="2" charset="-78"/>
                 <a:cs typeface="Amiri" pitchFamily="2" charset="-78"/>
               </a:rPr>
               <a:t>أَوَّلُ مُقَابَلَةِ عَمَلٍ</a:t>
@@ -5781,6 +5818,7 @@
                   <a:srgbClr val="1B3B6F"/>
                 </a:solidFill>
                 <a:latin typeface="Amiri" pitchFamily="2" charset="-78"/>
+                <a:ea typeface="Amiri" pitchFamily="2" charset="-78"/>
                 <a:cs typeface="Amiri" pitchFamily="2" charset="-78"/>
               </a:rPr>
               <a:t>(أ)</a:t>
@@ -5887,6 +5925,7 @@
                   <a:srgbClr val="1B3B6F"/>
                 </a:solidFill>
                 <a:latin typeface="Amiri" pitchFamily="2" charset="-78"/>
+                <a:ea typeface="Amiri" pitchFamily="2" charset="-78"/>
                 <a:cs typeface="Amiri" pitchFamily="2" charset="-78"/>
               </a:rPr>
               <a:t>الوَظِيفَةُ وَكَيْفَ تَقَدَّمْتَ لَهَا · كَيْفَ اسْتَعْدَدْتَ · مَا حَدَثَ فِي المُقَابَلَةِ · مَا تَعَلَّمْتَهُ وَخِطَطُكَ</a:t>
@@ -6018,6 +6057,7 @@
                   <a:srgbClr val="1B3B6F"/>
                 </a:solidFill>
                 <a:latin typeface="Amiri" pitchFamily="2" charset="-78"/>
+                <a:ea typeface="Amiri" pitchFamily="2" charset="-78"/>
                 <a:cs typeface="Amiri" pitchFamily="2" charset="-78"/>
               </a:rPr>
               <a:t>البَحْثُ عَنْ عَمَلٍ فِي العَصْرِ الرَّقْمِيِّ</a:t>
@@ -6056,6 +6096,7 @@
                   <a:srgbClr val="1B3B6F"/>
                 </a:solidFill>
                 <a:latin typeface="Amiri" pitchFamily="2" charset="-78"/>
+                <a:ea typeface="Amiri" pitchFamily="2" charset="-78"/>
                 <a:cs typeface="Amiri" pitchFamily="2" charset="-78"/>
               </a:rPr>
               <a:t>(ب)</a:t>
@@ -6162,6 +6203,7 @@
                   <a:srgbClr val="1B3B6F"/>
                 </a:solidFill>
                 <a:latin typeface="Amiri" pitchFamily="2" charset="-78"/>
+                <a:ea typeface="Amiri" pitchFamily="2" charset="-78"/>
                 <a:cs typeface="Amiri" pitchFamily="2" charset="-78"/>
               </a:rPr>
               <a:t>المَاضِي وَالحَاضِرُ · الإِيجَابِيَّاتُ وَالسَّلْبِيَّاتُ · مِثَالٌ مِنَ الوَاقِعِ · رَأْيُكَ وَنَصِيحَتُكَ</a:t>
@@ -6361,6 +6403,7 @@
                   <a:srgbClr val="D4AF37"/>
                 </a:solidFill>
                 <a:latin typeface="Amiri" pitchFamily="2" charset="-78"/>
+                <a:ea typeface="Amiri" pitchFamily="2" charset="-78"/>
                 <a:cs typeface="Amiri" pitchFamily="2" charset="-78"/>
               </a:rPr>
               <a:t>م</a:t>
@@ -6681,6 +6724,7 @@
                   <a:srgbClr val="8A6D1E"/>
                 </a:solidFill>
                 <a:latin typeface="Amiri" pitchFamily="2" charset="-78"/>
+                <a:ea typeface="Amiri" pitchFamily="2" charset="-78"/>
                 <a:cs typeface="Amiri" pitchFamily="2" charset="-78"/>
               </a:rPr>
               <a:t>خُطَّةُ الكِتَابَةِ</a:t>
@@ -7305,6 +7349,7 @@
                   <a:srgbClr val="1B3B6F"/>
                 </a:solidFill>
                 <a:latin typeface="Amiri" pitchFamily="2" charset="-78"/>
+                <a:ea typeface="Amiri" pitchFamily="2" charset="-78"/>
                 <a:cs typeface="Amiri" pitchFamily="2" charset="-78"/>
               </a:rPr>
               <a:t>أَتَدَرَّبُ عَلَى الأَسْئِلَةِ قَبْلَ كُلِّ مُقَابَلَةٍ.</a:t>
@@ -7404,6 +7449,7 @@
                   <a:srgbClr val="1B3B6F"/>
                 </a:solidFill>
                 <a:latin typeface="Amiri" pitchFamily="2" charset="-78"/>
+                <a:ea typeface="Amiri" pitchFamily="2" charset="-78"/>
                 <a:cs typeface="Amiri" pitchFamily="2" charset="-78"/>
               </a:rPr>
               <a:t>كَتَبْتُ سِيرَتِي الذَّاتِيَّةَ، وَأَرْسَلْتُهَا فِي اليَوْمِ نَفْسِهِ.</a:t>
@@ -7503,6 +7549,7 @@
                   <a:srgbClr val="1B3B6F"/>
                 </a:solidFill>
                 <a:latin typeface="Amiri" pitchFamily="2" charset="-78"/>
+                <a:ea typeface="Amiri" pitchFamily="2" charset="-78"/>
                 <a:cs typeface="Amiri" pitchFamily="2" charset="-78"/>
               </a:rPr>
               <a:t>سَأُضِيفُ كُلَّ خِبْرَةٍ جَدِيدَةٍ إِلَى سِيرَتِي.</a:t>
@@ -7664,6 +7711,7 @@
                   <a:srgbClr val="1F2A37"/>
                 </a:solidFill>
                 <a:latin typeface="Amiri" pitchFamily="2" charset="-78"/>
+                <a:ea typeface="Amiri" pitchFamily="2" charset="-78"/>
                 <a:cs typeface="Amiri" pitchFamily="2" charset="-78"/>
               </a:rPr>
               <a:t>أ</a:t>
@@ -7690,6 +7738,7 @@
                   <a:srgbClr val="1F2A37"/>
                 </a:solidFill>
                 <a:latin typeface="Amiri" pitchFamily="2" charset="-78"/>
+                <a:ea typeface="Amiri" pitchFamily="2" charset="-78"/>
                 <a:cs typeface="Amiri" pitchFamily="2" charset="-78"/>
               </a:rPr>
               <a:t>ب</a:t>
@@ -7836,6 +7885,7 @@
                   <a:srgbClr val="D4AF37"/>
                 </a:solidFill>
                 <a:latin typeface="Amiri" pitchFamily="2" charset="-78"/>
+                <a:ea typeface="Amiri" pitchFamily="2" charset="-78"/>
                 <a:cs typeface="Amiri" pitchFamily="2" charset="-78"/>
               </a:rPr>
               <a:t>م</a:t>
@@ -8093,6 +8143,7 @@
                   <a:srgbClr val="8A6D1E"/>
                 </a:solidFill>
                 <a:latin typeface="Amiri" pitchFamily="2" charset="-78"/>
+                <a:ea typeface="Amiri" pitchFamily="2" charset="-78"/>
                 <a:cs typeface="Amiri" pitchFamily="2" charset="-78"/>
               </a:rPr>
               <a:t>أ</a:t>
@@ -8157,6 +8208,7 @@
                   <a:srgbClr val="1B3B6F"/>
                 </a:solidFill>
                 <a:latin typeface="Amiri" pitchFamily="2" charset="-78"/>
+                <a:ea typeface="Amiri" pitchFamily="2" charset="-78"/>
                 <a:cs typeface="Amiri" pitchFamily="2" charset="-78"/>
               </a:rPr>
               <a:t>أ</a:t>
@@ -8208,6 +8260,7 @@
                   <a:srgbClr val="8A6D1E"/>
                 </a:solidFill>
                 <a:latin typeface="Amiri" pitchFamily="2" charset="-78"/>
+                <a:ea typeface="Amiri" pitchFamily="2" charset="-78"/>
                 <a:cs typeface="Amiri" pitchFamily="2" charset="-78"/>
               </a:rPr>
               <a:t>نَمُوذَجُ الإِجَابَةِ</a:t>
@@ -8321,6 +8374,7 @@
                   <a:srgbClr val="1F2A37"/>
                 </a:solidFill>
                 <a:latin typeface="Amiri" pitchFamily="2" charset="-78"/>
+                <a:ea typeface="Amiri" pitchFamily="2" charset="-78"/>
                 <a:cs typeface="Amiri" pitchFamily="2" charset="-78"/>
               </a:rPr>
               <a:t>فِي السَّنَةِ المَاضِيَةِ تَقَدَّمْتُ لِأَوَّلِ وَظِيفَةٍ فِي حَيَاتِي. كَانَتْ وَظِيفَةً فِي مَقْهًى قُرْبَ بَيْتِي، يَوْمَ السَّبْتِ فَقَطْ. رَأَيْتُ الإِعْلَانَ عَلَى نَافِذَةِ المَقْهَى، فَكَتَبْتُ سِيرَتِي الذَّاتِيَّةَ، وَأَرْسَلْتُهَا فِي اليَوْمِ نَفْسِهِ. كُنْتُ مُتَحَمِّسًا جِدًّا.</a:t>
@@ -8340,6 +8394,7 @@
                   <a:srgbClr val="1F2A37"/>
                 </a:solidFill>
                 <a:latin typeface="Amiri" pitchFamily="2" charset="-78"/>
+                <a:ea typeface="Amiri" pitchFamily="2" charset="-78"/>
                 <a:cs typeface="Amiri" pitchFamily="2" charset="-78"/>
               </a:rPr>
               <a:t>قَبْلَ المُقَابَلَةِ كُنْتُ مُتَوَتِّرًا جِدًّا. قَرَأْتُ عَنِ المَقْهَى، وَتَدَرَّبْتُ عَلَى الأَسْئِلَةِ مَعَ أُمِّي. لَبِسْتُ مَلَابِسَ نَظِيفَةً وَرَسْمِيَّةً، وَوَصَلْتُ قَبْلَ المَوْعِدِ بِعَشْرِ دَقَائِقَ. أَخَذْتُ مَعِي نُسْخَةً مِنْ سِيرَتِي.</a:t>
@@ -8359,6 +8414,7 @@
                   <a:srgbClr val="1F2A37"/>
                 </a:solidFill>
                 <a:latin typeface="Amiri" pitchFamily="2" charset="-78"/>
+                <a:ea typeface="Amiri" pitchFamily="2" charset="-78"/>
                 <a:cs typeface="Amiri" pitchFamily="2" charset="-78"/>
               </a:rPr>
               <a:t>فِي المُقَابَلَةِ سَأَلَتْنِي المُدِيرَةُ عَنْ خِبْرَتِي. أَخْبَرْتُهَا أَنِّي أُسَاعِدُ أَبِي فِي مَحَلِّهِ، وَأَنِّي أُحِبُّ العَمَلَ مَعَ النَّاسِ. ثُمَّ سَأَلْتُهَا عَنْ سَاعَاتِ العَمَلِ. بَعْدَ يَوْمَيْنِ اتَّصَلَتْ بِي، وَقَبِلَتْنِي! فَرِحْتُ كَثِيرًا.</a:t>
@@ -8378,6 +8434,7 @@
                   <a:srgbClr val="1F2A37"/>
                 </a:solidFill>
                 <a:latin typeface="Amiri" pitchFamily="2" charset="-78"/>
+                <a:ea typeface="Amiri" pitchFamily="2" charset="-78"/>
                 <a:cs typeface="Amiri" pitchFamily="2" charset="-78"/>
               </a:rPr>
               <a:t>فِي رَأْيِي، الاسْتِعْدَادُ أَهَمُّ شَيْءٍ قَبْلَ المُقَابَلَةِ. فِي المُسْتَقْبَلِ سَأَتَقَدَّمُ لِوَظَائِفَ أُخْرَى، وَسَأُضِيفُ كُلَّ خِبْرَةٍ جَدِيدَةٍ إِلَى سِيرَتِي الذَّاتِيَّةِ، لِكَيْ أَجِدَ عَمَلًا أَفْضَلَ.</a:t>
@@ -8541,11 +8598,12 @@
               <a:buNone/>
             </a:pPr>
             <a:r>
-              <a:rPr lang="en-US" sz="950" b="1" dirty="0">
+              <a:rPr lang="ar-SA" sz="950" b="1" dirty="0">
                 <a:solidFill>
                   <a:srgbClr val="FFFFFF"/>
                 </a:solidFill>
                 <a:latin typeface="Calibri" pitchFamily="34" charset="0"/>
+                <a:ea typeface="Amiri" pitchFamily="2" charset="-78"/>
                 <a:cs typeface="Amiri" pitchFamily="2" charset="-78"/>
               </a:rPr>
               <a:t>وَأَرْسَلْتُهَا</a:t>
@@ -8606,11 +8664,12 @@
               <a:buNone/>
             </a:pPr>
             <a:r>
-              <a:rPr lang="en-US" sz="950" b="1" dirty="0">
+              <a:rPr lang="ar-SA" sz="950" b="1" dirty="0">
                 <a:solidFill>
                   <a:srgbClr val="FFFFFF"/>
                 </a:solidFill>
                 <a:latin typeface="Calibri" pitchFamily="34" charset="0"/>
+                <a:ea typeface="Amiri" pitchFamily="2" charset="-78"/>
                 <a:cs typeface="Amiri" pitchFamily="2" charset="-78"/>
               </a:rPr>
               <a:t>كُنْتُ مُتَوَتِّرًا</a:t>
@@ -8671,11 +8730,12 @@
               <a:buNone/>
             </a:pPr>
             <a:r>
-              <a:rPr lang="en-US" sz="950" b="1" dirty="0">
+              <a:rPr lang="ar-SA" sz="950" b="1" dirty="0">
                 <a:solidFill>
                   <a:srgbClr val="FFFFFF"/>
                 </a:solidFill>
                 <a:latin typeface="Calibri" pitchFamily="34" charset="0"/>
+                <a:ea typeface="Amiri" pitchFamily="2" charset="-78"/>
                 <a:cs typeface="Amiri" pitchFamily="2" charset="-78"/>
               </a:rPr>
               <a:t>سَأَلَتْنِي المُدِيرَةُ</a:t>
@@ -8736,11 +8796,12 @@
               <a:buNone/>
             </a:pPr>
             <a:r>
-              <a:rPr lang="en-US" sz="950" b="1" dirty="0">
+              <a:rPr lang="ar-SA" sz="950" b="1" dirty="0">
                 <a:solidFill>
                   <a:srgbClr val="FFFFFF"/>
                 </a:solidFill>
                 <a:latin typeface="Calibri" pitchFamily="34" charset="0"/>
+                <a:ea typeface="Amiri" pitchFamily="2" charset="-78"/>
                 <a:cs typeface="Amiri" pitchFamily="2" charset="-78"/>
               </a:rPr>
               <a:t>سَأُضِيفُ</a:t>
@@ -8874,6 +8935,7 @@
                   <a:srgbClr val="D4AF37"/>
                 </a:solidFill>
                 <a:latin typeface="Amiri" pitchFamily="2" charset="-78"/>
+                <a:ea typeface="Amiri" pitchFamily="2" charset="-78"/>
                 <a:cs typeface="Amiri" pitchFamily="2" charset="-78"/>
               </a:rPr>
               <a:t>م</a:t>
@@ -9131,6 +9193,7 @@
                   <a:srgbClr val="8A6D1E"/>
                 </a:solidFill>
                 <a:latin typeface="Amiri" pitchFamily="2" charset="-78"/>
+                <a:ea typeface="Amiri" pitchFamily="2" charset="-78"/>
                 <a:cs typeface="Amiri" pitchFamily="2" charset="-78"/>
               </a:rPr>
               <a:t>أ</a:t>
@@ -9195,6 +9258,7 @@
                   <a:srgbClr val="1B3B6F"/>
                 </a:solidFill>
                 <a:latin typeface="Amiri" pitchFamily="2" charset="-78"/>
+                <a:ea typeface="Amiri" pitchFamily="2" charset="-78"/>
                 <a:cs typeface="Amiri" pitchFamily="2" charset="-78"/>
               </a:rPr>
               <a:t>أ</a:t>
@@ -9246,6 +9310,7 @@
                   <a:srgbClr val="8A6D1E"/>
                 </a:solidFill>
                 <a:latin typeface="Amiri" pitchFamily="2" charset="-78"/>
+                <a:ea typeface="Amiri" pitchFamily="2" charset="-78"/>
                 <a:cs typeface="Amiri" pitchFamily="2" charset="-78"/>
               </a:rPr>
               <a:t>نَمُوذَجُ الإِجَابَةِ</a:t>
@@ -9359,6 +9424,7 @@
                   <a:srgbClr val="1F2A37"/>
                 </a:solidFill>
                 <a:latin typeface="Amiri" pitchFamily="2" charset="-78"/>
+                <a:ea typeface="Amiri" pitchFamily="2" charset="-78"/>
                 <a:cs typeface="Amiri" pitchFamily="2" charset="-78"/>
               </a:rPr>
               <a:t>مَا زِلْتُ أَتَذَكَّرُ يَدَيَّ تَرْتَجِفَانِ وَأَنَا أَطْرُقُ بَابَ مَكْتَبِ المُدِيرَةِ فِي أَوَّلِ مُقَابَلَةِ عَمَلٍ فِي حَيَاتِي. كَانَتِ الوَظِيفَةُ بَسِيطَةً: مُسَاعِدٌ فِي مَقْهًى يَوْمَ السَّبْتِ، غَيْرَ أَنَّهَا بَدَتْ لِي يَوْمَهَا أَهَمَّ مِنْ أَيِّ امْتِحَانٍ، لِأَنَّهَا كَانَتْ خُطْوَتِي الأُولَى نَحْوَ الاسْتِقْلَالِ.</a:t>
@@ -9378,6 +9444,7 @@
                   <a:srgbClr val="1F2A37"/>
                 </a:solidFill>
                 <a:latin typeface="Amiri" pitchFamily="2" charset="-78"/>
+                <a:ea typeface="Amiri" pitchFamily="2" charset="-78"/>
                 <a:cs typeface="Amiri" pitchFamily="2" charset="-78"/>
               </a:rPr>
               <a:t>وَقَدِ اسْتَعْدَدْتُ لَهَا جَيِّدًا؛ فَقَرَأْتُ عَنِ المَقْهَى وَتَارِيخِهِ وَقَائِمَةِ طَعَامِهِ، وَكَتَبْتُ عَشَرَةَ أَسْئِلَةٍ مُتَوَقَّعَةً، وَتَدَرَّبْتُ عَلَيْهَا مَعَ أَخِي الَّذِي لَعِبَ دَوْرَ المُحَاوِرِ بِجِدِّيَّةٍ أَضْحَكَتْنَا كَثِيرًا.</a:t>
@@ -9397,6 +9464,7 @@
                   <a:srgbClr val="1F2A37"/>
                 </a:solidFill>
                 <a:latin typeface="Amiri" pitchFamily="2" charset="-78"/>
+                <a:ea typeface="Amiri" pitchFamily="2" charset="-78"/>
                 <a:cs typeface="Amiri" pitchFamily="2" charset="-78"/>
               </a:rPr>
               <a:t>وَفِي المُقَابَلَةِ، فَاجَأَتْنِي المُدِيرَةُ بِسُؤَالٍ لَمْ أَتَوَقَّعْهُ: "مَاذَا تَفْعَلُ إِذَا أَسْقَطْتَ صِينِيَّةً أَمَامَ الزَّبَائِنِ؟". فَابْتَسَمْتُ وَقُلْتُ إِنَّنِي سَأَعْتَذِرُ، ثُمَّ أُنَظِّفُ المَكَانَ بِسُرْعَةٍ، وَأُحْضِرُ طَلَبًا جَدِيدًا عَلَى حِسَابِي. وَبَعْدَ يَوْمَيْنِ اتَّصَلَتْ بِي لِتُخْبِرَنِي أَنَّ جَوَابِي أَعْجَبَهَا، وَأَنَّنِي قُبِلْتُ.</a:t>
@@ -9416,6 +9484,7 @@
                   <a:srgbClr val="1F2A37"/>
                 </a:solidFill>
                 <a:latin typeface="Amiri" pitchFamily="2" charset="-78"/>
+                <a:ea typeface="Amiri" pitchFamily="2" charset="-78"/>
                 <a:cs typeface="Amiri" pitchFamily="2" charset="-78"/>
               </a:rPr>
               <a:t>صَحِيحٌ أَنَّ الاسْتِعْدَادَ ضَرُورِيٌّ، غَيْرَ أَنَّ الهُدُوءَ وَالصِّدْقَ هُمَا مَا يُقْنِعُ المُحَاوِرَ فِي النِّهَايَةِ، لَا الإِجَابَاتُ المَحْفُوظَةُ. وَلَوْ عُدْتُ إِلَى تِلْكَ اللَّحْظَةِ، لَقُلْتُ لِنَفْسِي: "لَا تَخَفْ، فَهُمْ يُرِيدُونَ أَنْ تَنْجَحَ".</a:t>
@@ -9514,11 +9583,12 @@
               <a:buNone/>
             </a:pPr>
             <a:r>
-              <a:rPr lang="en-US" sz="950" b="1" dirty="0">
+              <a:rPr lang="ar-SA" sz="950" b="1" dirty="0">
                 <a:solidFill>
                   <a:srgbClr val="FFFFFF"/>
                 </a:solidFill>
                 <a:latin typeface="Calibri" pitchFamily="34" charset="0"/>
+                <a:ea typeface="Amiri" pitchFamily="2" charset="-78"/>
                 <a:cs typeface="Amiri" pitchFamily="2" charset="-78"/>
               </a:rPr>
               <a:t>يَدَيَّ تَرْتَجِفَانِ</a:t>
@@ -9579,11 +9649,12 @@
               <a:buNone/>
             </a:pPr>
             <a:r>
-              <a:rPr lang="en-US" sz="950" b="1" dirty="0">
+              <a:rPr lang="ar-SA" sz="950" b="1" dirty="0">
                 <a:solidFill>
                   <a:srgbClr val="FFFFFF"/>
                 </a:solidFill>
                 <a:latin typeface="Calibri" pitchFamily="34" charset="0"/>
+                <a:ea typeface="Amiri" pitchFamily="2" charset="-78"/>
                 <a:cs typeface="Amiri" pitchFamily="2" charset="-78"/>
               </a:rPr>
               <a:t>لَعِبَ دَوْرَ المُحَاوِرِ</a:t>
@@ -9644,11 +9715,12 @@
               <a:buNone/>
             </a:pPr>
             <a:r>
-              <a:rPr lang="en-US" sz="950" b="1" dirty="0">
+              <a:rPr lang="ar-SA" sz="950" b="1" dirty="0">
                 <a:solidFill>
                   <a:srgbClr val="FFFFFF"/>
                 </a:solidFill>
                 <a:latin typeface="Calibri" pitchFamily="34" charset="0"/>
+                <a:ea typeface="Amiri" pitchFamily="2" charset="-78"/>
                 <a:cs typeface="Amiri" pitchFamily="2" charset="-78"/>
               </a:rPr>
               <a:t>لَمْ أَتَوَقَّعْهُ</a:t>
@@ -9709,11 +9781,12 @@
               <a:buNone/>
             </a:pPr>
             <a:r>
-              <a:rPr lang="en-US" sz="950" b="1" dirty="0">
+              <a:rPr lang="ar-SA" sz="950" b="1" dirty="0">
                 <a:solidFill>
                   <a:srgbClr val="FFFFFF"/>
                 </a:solidFill>
                 <a:latin typeface="Calibri" pitchFamily="34" charset="0"/>
+                <a:ea typeface="Amiri" pitchFamily="2" charset="-78"/>
                 <a:cs typeface="Amiri" pitchFamily="2" charset="-78"/>
               </a:rPr>
               <a:t>لَوْ عُدْتُ … لَقُلْتُ</a:t>
@@ -9847,6 +9920,7 @@
                   <a:srgbClr val="D4AF37"/>
                 </a:solidFill>
                 <a:latin typeface="Amiri" pitchFamily="2" charset="-78"/>
+                <a:ea typeface="Amiri" pitchFamily="2" charset="-78"/>
                 <a:cs typeface="Amiri" pitchFamily="2" charset="-78"/>
               </a:rPr>
               <a:t>م</a:t>
@@ -10104,6 +10178,7 @@
                   <a:srgbClr val="8A6D1E"/>
                 </a:solidFill>
                 <a:latin typeface="Amiri" pitchFamily="2" charset="-78"/>
+                <a:ea typeface="Amiri" pitchFamily="2" charset="-78"/>
                 <a:cs typeface="Amiri" pitchFamily="2" charset="-78"/>
               </a:rPr>
               <a:t>ب</a:t>
@@ -10168,6 +10243,7 @@
                   <a:srgbClr val="1B3B6F"/>
                 </a:solidFill>
                 <a:latin typeface="Amiri" pitchFamily="2" charset="-78"/>
+                <a:ea typeface="Amiri" pitchFamily="2" charset="-78"/>
                 <a:cs typeface="Amiri" pitchFamily="2" charset="-78"/>
               </a:rPr>
               <a:t>ب</a:t>
@@ -10219,6 +10295,7 @@
                   <a:srgbClr val="8A6D1E"/>
                 </a:solidFill>
                 <a:latin typeface="Amiri" pitchFamily="2" charset="-78"/>
+                <a:ea typeface="Amiri" pitchFamily="2" charset="-78"/>
                 <a:cs typeface="Amiri" pitchFamily="2" charset="-78"/>
               </a:rPr>
               <a:t>نَمُوذَجُ الإِجَابَةِ</a:t>
@@ -10332,6 +10409,7 @@
                   <a:srgbClr val="1F2A37"/>
                 </a:solidFill>
                 <a:latin typeface="Amiri" pitchFamily="2" charset="-78"/>
+                <a:ea typeface="Amiri" pitchFamily="2" charset="-78"/>
                 <a:cs typeface="Amiri" pitchFamily="2" charset="-78"/>
               </a:rPr>
               <a:t>قَبْلَ عِشْرِينَ سَنَةً، كَانَ البَاحِثُ عَنْ عَمَلٍ يَقْرَأُ إِعْلَانَاتِ الصُّحُفِ، وَيَكْتُبُ رِسَالَةً بِخَطِّ يَدِهِ، ثُمَّ يَنْتَظِرُ الرَّدَّ أَسَابِيعَ. أَمَّا اليَوْمَ، فَيَتَقَدَّمُ لِعَشَرَاتِ الوَظَائِفِ بِضَغْطَةِ زِرٍّ، وَقَدْ يُقَابِلُهُ بَرْنَامَجٌ ذَكِيٌّ قَبْلَ أَنْ يُقَابِلَهُ إِنْسَانٌ.</a:t>
@@ -10351,6 +10429,7 @@
                   <a:srgbClr val="1F2A37"/>
                 </a:solidFill>
                 <a:latin typeface="Amiri" pitchFamily="2" charset="-78"/>
+                <a:ea typeface="Amiri" pitchFamily="2" charset="-78"/>
                 <a:cs typeface="Amiri" pitchFamily="2" charset="-78"/>
               </a:rPr>
               <a:t>مِنْ نَاحِيَةٍ، جَعَلَتِ التِّكْنُولُوجْيَا التَّقَدُّمَ لِلْوَظَائِفِ أَسْرَعَ وَأَسْهَلَ، وَأَتَاحَتْ لِلشَّبَابِ أَنْ يَعْمَلُوا مَعَ شَرِكَاتٍ فِي بُلْدَانٍ أُخْرَى. وَمِنْ نَاحِيَةٍ أُخْرَى، تَرْفُضُ بَعْضُ البَرَامِجِ السِّيَرَ الذَّاتِيَّةَ تِلْقَائِيًّا إِذَا لَمْ تَجِدْ فِيهَا كَلِمَاتٍ مُعَيَّنَةً، مِمَّا قَدْ يَظْلِمُ مُتَقَدِّمِينَ أَكْفَاءَ.</a:t>
@@ -10370,6 +10449,7 @@
                   <a:srgbClr val="1F2A37"/>
                 </a:solidFill>
                 <a:latin typeface="Amiri" pitchFamily="2" charset="-78"/>
+                <a:ea typeface="Amiri" pitchFamily="2" charset="-78"/>
                 <a:cs typeface="Amiri" pitchFamily="2" charset="-78"/>
               </a:rPr>
               <a:t>وَقَدْ عَاشَتْ أُخْتِي هٰذِهِ التَّجْرِبَةَ؛ فَبَعْدَ تَخَرُّجِهَا أَرْسَلَتْ أَكْثَرَ مِنْ خَمْسِينَ طَلَبًا دُونَ أَنْ يَرُدَّ عَلَيْهَا أَحَدٌ، إِلَى أَنْ نَصَحَهَا مُرْشِدٌ بِأَنْ تُعَدِّلَ سِيرَتَهَا لِكُلِّ وَظِيفَةٍ، فَدُعِيَتْ إِلَى ثَلَاثِ مُقَابَلَاتٍ فِي أُسْبُوعٍ وَاحِدٍ.</a:t>
@@ -10389,6 +10469,7 @@
                   <a:srgbClr val="1F2A37"/>
                 </a:solidFill>
                 <a:latin typeface="Amiri" pitchFamily="2" charset="-78"/>
+                <a:ea typeface="Amiri" pitchFamily="2" charset="-78"/>
                 <a:cs typeface="Amiri" pitchFamily="2" charset="-78"/>
               </a:rPr>
               <a:t>صَحِيحٌ أَنَّ الآلَاتِ تُسَاعِدُ الشَّرِكَاتِ عَلَى تَوْفِيرِ الوَقْتِ، غَيْرَ أَنَّ القَرَارَ النِّهَائِيَّ يَجِبُ أَنْ يَبْقَى إِنْسَانِيًّا. وَإِذَا تَعَلَّمَ الشَّبَابُ كَيْفَ يُقَدِّمُونَ أَنْفُسَهُمْ بِذَكَاءٍ، فَسَيَصِلُونَ إِلَى المُقَابَلَةِ، حَيْثُ تَتَكَلَّمُ شَخْصِيَّاتُهُمْ عَنْهُمْ.</a:t>
@@ -10487,11 +10568,12 @@
               <a:buNone/>
             </a:pPr>
             <a:r>
-              <a:rPr lang="en-US" sz="950" b="1" dirty="0">
+              <a:rPr lang="ar-SA" sz="950" b="1" dirty="0">
                 <a:solidFill>
                   <a:srgbClr val="FFFFFF"/>
                 </a:solidFill>
                 <a:latin typeface="Calibri" pitchFamily="34" charset="0"/>
+                <a:ea typeface="Amiri" pitchFamily="2" charset="-78"/>
                 <a:cs typeface="Amiri" pitchFamily="2" charset="-78"/>
               </a:rPr>
               <a:t>كَانَ البَاحِثُ … يَقْرَأُ</a:t>
@@ -10552,11 +10634,12 @@
               <a:buNone/>
             </a:pPr>
             <a:r>
-              <a:rPr lang="en-US" sz="950" b="1" dirty="0">
+              <a:rPr lang="ar-SA" sz="950" b="1" dirty="0">
                 <a:solidFill>
                   <a:srgbClr val="FFFFFF"/>
                 </a:solidFill>
                 <a:latin typeface="Calibri" pitchFamily="34" charset="0"/>
+                <a:ea typeface="Amiri" pitchFamily="2" charset="-78"/>
                 <a:cs typeface="Amiri" pitchFamily="2" charset="-78"/>
               </a:rPr>
               <a:t>قَبْلَ أَنْ يُقَابِلَهُ</a:t>
@@ -10617,11 +10700,12 @@
               <a:buNone/>
             </a:pPr>
             <a:r>
-              <a:rPr lang="en-US" sz="950" b="1" dirty="0">
+              <a:rPr lang="ar-SA" sz="950" b="1" dirty="0">
                 <a:solidFill>
                   <a:srgbClr val="FFFFFF"/>
                 </a:solidFill>
                 <a:latin typeface="Calibri" pitchFamily="34" charset="0"/>
+                <a:ea typeface="Amiri" pitchFamily="2" charset="-78"/>
                 <a:cs typeface="Amiri" pitchFamily="2" charset="-78"/>
               </a:rPr>
               <a:t>مِمَّا قَدْ يَظْلِمُ</a:t>
@@ -10682,11 +10766,12 @@
               <a:buNone/>
             </a:pPr>
             <a:r>
-              <a:rPr lang="en-US" sz="950" b="1" dirty="0">
+              <a:rPr lang="ar-SA" sz="950" b="1" dirty="0">
                 <a:solidFill>
                   <a:srgbClr val="FFFFFF"/>
                 </a:solidFill>
                 <a:latin typeface="Calibri" pitchFamily="34" charset="0"/>
+                <a:ea typeface="Amiri" pitchFamily="2" charset="-78"/>
                 <a:cs typeface="Amiri" pitchFamily="2" charset="-78"/>
               </a:rPr>
               <a:t>فَدُعِيَتْ</a:t>
@@ -10820,6 +10905,7 @@
                   <a:srgbClr val="D4AF37"/>
                 </a:solidFill>
                 <a:latin typeface="Amiri" pitchFamily="2" charset="-78"/>
+                <a:ea typeface="Amiri" pitchFamily="2" charset="-78"/>
                 <a:cs typeface="Amiri" pitchFamily="2" charset="-78"/>
               </a:rPr>
               <a:t>م</a:t>
@@ -11140,6 +11226,7 @@
                   <a:srgbClr val="8A6D1E"/>
                 </a:solidFill>
                 <a:latin typeface="Amiri" pitchFamily="2" charset="-78"/>
+                <a:ea typeface="Amiri" pitchFamily="2" charset="-78"/>
                 <a:cs typeface="Amiri" pitchFamily="2" charset="-78"/>
               </a:rPr>
               <a:t>قَيِّمْ عَمَلَكَ</a:t>
@@ -12384,6 +12471,7 @@
                   <a:srgbClr val="FFFFFF"/>
                 </a:solidFill>
                 <a:latin typeface="Amiri" pitchFamily="2" charset="-78"/>
+                <a:ea typeface="Amiri" pitchFamily="2" charset="-78"/>
                 <a:cs typeface="Amiri" pitchFamily="2" charset="-78"/>
               </a:rPr>
               <a:t>أَحْسَنْتُمْ! إِلَى اللِّقَاءِ</a:t>
@@ -12536,6 +12624,7 @@
                   <a:srgbClr val="D4AF37"/>
                 </a:solidFill>
                 <a:latin typeface="Amiri" pitchFamily="2" charset="-78"/>
+                <a:ea typeface="Amiri" pitchFamily="2" charset="-78"/>
                 <a:cs typeface="Amiri" pitchFamily="2" charset="-78"/>
               </a:rPr>
               <a:t>وَرْشَةُ التَّدْرِيبِ</a:t>
@@ -12669,6 +12758,7 @@
                   <a:srgbClr val="D4AF37"/>
                 </a:solidFill>
                 <a:latin typeface="Amiri" pitchFamily="2" charset="-78"/>
+                <a:ea typeface="Amiri" pitchFamily="2" charset="-78"/>
                 <a:cs typeface="Amiri" pitchFamily="2" charset="-78"/>
               </a:rPr>
               <a:t>م</a:t>
@@ -12989,6 +13079,7 @@
                   <a:srgbClr val="8A6D1E"/>
                 </a:solidFill>
                 <a:latin typeface="Amiri" pitchFamily="2" charset="-78"/>
+                <a:ea typeface="Amiri" pitchFamily="2" charset="-78"/>
                 <a:cs typeface="Amiri" pitchFamily="2" charset="-78"/>
               </a:rPr>
               <a:t>آدَابُ الصَّفِّ</a:t>
@@ -14520,6 +14611,7 @@
                   <a:srgbClr val="D4AF37"/>
                 </a:solidFill>
                 <a:latin typeface="Amiri" pitchFamily="2" charset="-78"/>
+                <a:ea typeface="Amiri" pitchFamily="2" charset="-78"/>
                 <a:cs typeface="Amiri" pitchFamily="2" charset="-78"/>
               </a:rPr>
               <a:t>م</a:t>
@@ -14840,6 +14932,7 @@
                   <a:srgbClr val="8A6D1E"/>
                 </a:solidFill>
                 <a:latin typeface="Amiri" pitchFamily="2" charset="-78"/>
+                <a:ea typeface="Amiri" pitchFamily="2" charset="-78"/>
                 <a:cs typeface="Amiri" pitchFamily="2" charset="-78"/>
               </a:rPr>
               <a:t>خَرِيطَةُ الوَرْشَةِ</a:t>
@@ -15154,6 +15247,7 @@
                   <a:srgbClr val="1B3B6F"/>
                 </a:solidFill>
                 <a:latin typeface="Amiri" pitchFamily="2" charset="-78"/>
+                <a:ea typeface="Amiri" pitchFamily="2" charset="-78"/>
                 <a:cs typeface="Amiri" pitchFamily="2" charset="-78"/>
               </a:rPr>
               <a:t>كَيْفَ</a:t>
@@ -15430,6 +15524,7 @@
                   <a:srgbClr val="1E6B52"/>
                 </a:solidFill>
                 <a:latin typeface="Amiri" pitchFamily="2" charset="-78"/>
+                <a:ea typeface="Amiri" pitchFamily="2" charset="-78"/>
                 <a:cs typeface="Amiri" pitchFamily="2" charset="-78"/>
               </a:rPr>
               <a:t>الاسْتِمَارَةُ</a:t>
@@ -15706,6 +15801,7 @@
                   <a:srgbClr val="1E6B52"/>
                 </a:solidFill>
                 <a:latin typeface="Amiri" pitchFamily="2" charset="-78"/>
+                <a:ea typeface="Amiri" pitchFamily="2" charset="-78"/>
                 <a:cs typeface="Amiri" pitchFamily="2" charset="-78"/>
               </a:rPr>
               <a:t>الرِّسَالَةُ</a:t>
@@ -15982,6 +16078,7 @@
                   <a:srgbClr val="1E6B52"/>
                 </a:solidFill>
                 <a:latin typeface="Amiri" pitchFamily="2" charset="-78"/>
+                <a:ea typeface="Amiri" pitchFamily="2" charset="-78"/>
                 <a:cs typeface="Amiri" pitchFamily="2" charset="-78"/>
               </a:rPr>
               <a:t>المَقَالُ</a:t>
@@ -16258,6 +16355,7 @@
                   <a:srgbClr val="8A6D1E"/>
                 </a:solidFill>
                 <a:latin typeface="Amiri" pitchFamily="2" charset="-78"/>
+                <a:ea typeface="Amiri" pitchFamily="2" charset="-78"/>
                 <a:cs typeface="Amiri" pitchFamily="2" charset="-78"/>
               </a:rPr>
               <a:t>قَيِّمْ</a:t>
@@ -16501,6 +16599,7 @@
                   <a:srgbClr val="D4AF37"/>
                 </a:solidFill>
                 <a:latin typeface="Amiri" pitchFamily="2" charset="-78"/>
+                <a:ea typeface="Amiri" pitchFamily="2" charset="-78"/>
                 <a:cs typeface="Amiri" pitchFamily="2" charset="-78"/>
               </a:rPr>
               <a:t>م</a:t>
@@ -16821,6 +16920,7 @@
                   <a:srgbClr val="8A6D1E"/>
                 </a:solidFill>
                 <a:latin typeface="Amiri" pitchFamily="2" charset="-78"/>
+                <a:ea typeface="Amiri" pitchFamily="2" charset="-78"/>
                 <a:cs typeface="Amiri" pitchFamily="2" charset="-78"/>
               </a:rPr>
               <a:t>امْتِحَانُ الكِتَابَةِ</a:t>
@@ -17445,6 +17545,7 @@
                   <a:srgbClr val="1B3B6F"/>
                 </a:solidFill>
                 <a:latin typeface="Amiri" pitchFamily="2" charset="-78"/>
+                <a:ea typeface="Amiri" pitchFamily="2" charset="-78"/>
                 <a:cs typeface="Amiri" pitchFamily="2" charset="-78"/>
               </a:rPr>
               <a:t>أَوَدُّ أَنْ أَتَقَدَّمَ لِوَظِيفَةِ المُسَاعِدِ الَّتِي رَأَيْتُهَا</a:t>
@@ -17544,6 +17645,7 @@
                   <a:srgbClr val="1B3B6F"/>
                 </a:solidFill>
                 <a:latin typeface="Amiri" pitchFamily="2" charset="-78"/>
+                <a:ea typeface="Amiri" pitchFamily="2" charset="-78"/>
                 <a:cs typeface="Amiri" pitchFamily="2" charset="-78"/>
               </a:rPr>
               <a:t>نَظَّمْتُ نَادِيًا لِلْقِرَاءَةِ وَأَدَرْتُهُ أُسْبُوعِيًّا</a:t>
@@ -17643,6 +17745,7 @@
                   <a:srgbClr val="1B3B6F"/>
                 </a:solidFill>
                 <a:latin typeface="Amiri" pitchFamily="2" charset="-78"/>
+                <a:ea typeface="Amiri" pitchFamily="2" charset="-78"/>
                 <a:cs typeface="Amiri" pitchFamily="2" charset="-78"/>
               </a:rPr>
               <a:t>هَلْ يُمْكِنُنِي أَنْ أَسْأَلَ عَنْ سَاعَاتِ العَمَلِ؟</a:t>
@@ -17814,6 +17917,7 @@
                   <a:srgbClr val="D4AF37"/>
                 </a:solidFill>
                 <a:latin typeface="Amiri" pitchFamily="2" charset="-78"/>
+                <a:ea typeface="Amiri" pitchFamily="2" charset="-78"/>
                 <a:cs typeface="Amiri" pitchFamily="2" charset="-78"/>
               </a:rPr>
               <a:t>م</a:t>
@@ -18134,6 +18238,7 @@
                   <a:srgbClr val="8A6D1E"/>
                 </a:solidFill>
                 <a:latin typeface="Amiri" pitchFamily="2" charset="-78"/>
+                <a:ea typeface="Amiri" pitchFamily="2" charset="-78"/>
                 <a:cs typeface="Amiri" pitchFamily="2" charset="-78"/>
               </a:rPr>
               <a:t>اسْتِمَارَةُ طَلَبِ وَظِيفَةٍ</a:t>
@@ -18490,6 +18595,7 @@
                   <a:srgbClr val="1B3B6F"/>
                 </a:solidFill>
                 <a:latin typeface="Amiri" pitchFamily="2" charset="-78"/>
+                <a:ea typeface="Amiri" pitchFamily="2" charset="-78"/>
                 <a:cs typeface="Amiri" pitchFamily="2" charset="-78"/>
               </a:rPr>
               <a:t>الاسْمُ الكَامِلُ</a:t>
@@ -18734,6 +18840,7 @@
                   <a:srgbClr val="1B3B6F"/>
                 </a:solidFill>
                 <a:latin typeface="Amiri" pitchFamily="2" charset="-78"/>
+                <a:ea typeface="Amiri" pitchFamily="2" charset="-78"/>
                 <a:cs typeface="Amiri" pitchFamily="2" charset="-78"/>
               </a:rPr>
               <a:t>تَارِيخُ المِيلَادِ</a:t>
@@ -18978,6 +19085,7 @@
                   <a:srgbClr val="1B3B6F"/>
                 </a:solidFill>
                 <a:latin typeface="Amiri" pitchFamily="2" charset="-78"/>
+                <a:ea typeface="Amiri" pitchFamily="2" charset="-78"/>
                 <a:cs typeface="Amiri" pitchFamily="2" charset="-78"/>
               </a:rPr>
               <a:t>الوَظِيفَةُ المَطْلُوبَةُ</a:t>
@@ -19222,6 +19330,7 @@
                   <a:srgbClr val="1B3B6F"/>
                 </a:solidFill>
                 <a:latin typeface="Amiri" pitchFamily="2" charset="-78"/>
+                <a:ea typeface="Amiri" pitchFamily="2" charset="-78"/>
                 <a:cs typeface="Amiri" pitchFamily="2" charset="-78"/>
               </a:rPr>
               <a:t>المُؤَهِّلَاتُ</a:t>
@@ -19466,6 +19575,7 @@
                   <a:srgbClr val="1B3B6F"/>
                 </a:solidFill>
                 <a:latin typeface="Amiri" pitchFamily="2" charset="-78"/>
+                <a:ea typeface="Amiri" pitchFamily="2" charset="-78"/>
                 <a:cs typeface="Amiri" pitchFamily="2" charset="-78"/>
               </a:rPr>
               <a:t>الخِبْرَةُ السَّابِقَةُ</a:t>
@@ -19710,6 +19820,7 @@
                   <a:srgbClr val="1B3B6F"/>
                 </a:solidFill>
                 <a:latin typeface="Amiri" pitchFamily="2" charset="-78"/>
+                <a:ea typeface="Amiri" pitchFamily="2" charset="-78"/>
                 <a:cs typeface="Amiri" pitchFamily="2" charset="-78"/>
               </a:rPr>
               <a:t>اللُّغَاتُ</a:t>
@@ -19954,6 +20065,7 @@
                   <a:srgbClr val="1B3B6F"/>
                 </a:solidFill>
                 <a:latin typeface="Amiri" pitchFamily="2" charset="-78"/>
+                <a:ea typeface="Amiri" pitchFamily="2" charset="-78"/>
                 <a:cs typeface="Amiri" pitchFamily="2" charset="-78"/>
               </a:rPr>
               <a:t>اسْمُ المُوصِي</a:t>
@@ -20133,6 +20245,7 @@
                   <a:srgbClr val="1B3B6F"/>
                 </a:solidFill>
                 <a:latin typeface="Amiri" pitchFamily="2" charset="-78"/>
+                <a:ea typeface="Amiri" pitchFamily="2" charset="-78"/>
                 <a:cs typeface="Amiri" pitchFamily="2" charset="-78"/>
               </a:rPr>
               <a:t>جُمْلَةٌ: مَاذَا فَعَلْتَ فِي عَمَلِكَ السَّابِقِ؟</a:t>
@@ -20342,6 +20455,7 @@
                   <a:srgbClr val="D4AF37"/>
                 </a:solidFill>
                 <a:latin typeface="Amiri" pitchFamily="2" charset="-78"/>
+                <a:ea typeface="Amiri" pitchFamily="2" charset="-78"/>
                 <a:cs typeface="Amiri" pitchFamily="2" charset="-78"/>
               </a:rPr>
               <a:t>م</a:t>
@@ -20662,6 +20776,7 @@
                   <a:srgbClr val="8A6D1E"/>
                 </a:solidFill>
                 <a:latin typeface="Amiri" pitchFamily="2" charset="-78"/>
+                <a:ea typeface="Amiri" pitchFamily="2" charset="-78"/>
                 <a:cs typeface="Amiri" pitchFamily="2" charset="-78"/>
               </a:rPr>
               <a:t>نَمُوذَجُ الإِجَابَةِ</a:t>
@@ -20980,6 +21095,7 @@
                   <a:srgbClr val="1B3B6F"/>
                 </a:solidFill>
                 <a:latin typeface="Amiri" pitchFamily="2" charset="-78"/>
+                <a:ea typeface="Amiri" pitchFamily="2" charset="-78"/>
                 <a:cs typeface="Amiri" pitchFamily="2" charset="-78"/>
               </a:rPr>
               <a:t>سَامِي أَحْمَدُ</a:t>
@@ -21018,6 +21134,7 @@
                   <a:srgbClr val="1B3B6F"/>
                 </a:solidFill>
                 <a:latin typeface="Amiri" pitchFamily="2" charset="-78"/>
+                <a:ea typeface="Amiri" pitchFamily="2" charset="-78"/>
                 <a:cs typeface="Amiri" pitchFamily="2" charset="-78"/>
               </a:rPr>
               <a:t>الاسْمُ الكَامِلُ</a:t>
@@ -21159,6 +21276,7 @@
                   <a:srgbClr val="1B3B6F"/>
                 </a:solidFill>
                 <a:latin typeface="Amiri" pitchFamily="2" charset="-78"/>
+                <a:ea typeface="Amiri" pitchFamily="2" charset="-78"/>
                 <a:cs typeface="Amiri" pitchFamily="2" charset="-78"/>
               </a:rPr>
               <a:t>١٥ مَارِس ٢٠٠٨</a:t>
@@ -21197,6 +21315,7 @@
                   <a:srgbClr val="1B3B6F"/>
                 </a:solidFill>
                 <a:latin typeface="Amiri" pitchFamily="2" charset="-78"/>
+                <a:ea typeface="Amiri" pitchFamily="2" charset="-78"/>
                 <a:cs typeface="Amiri" pitchFamily="2" charset="-78"/>
               </a:rPr>
               <a:t>تَارِيخُ المِيلَادِ</a:t>
@@ -21338,6 +21457,7 @@
                   <a:srgbClr val="1B3B6F"/>
                 </a:solidFill>
                 <a:latin typeface="Amiri" pitchFamily="2" charset="-78"/>
+                <a:ea typeface="Amiri" pitchFamily="2" charset="-78"/>
                 <a:cs typeface="Amiri" pitchFamily="2" charset="-78"/>
               </a:rPr>
               <a:t>مُسَاعِدٌ فِي المَكْتَبَةِ</a:t>
@@ -21376,6 +21496,7 @@
                   <a:srgbClr val="1B3B6F"/>
                 </a:solidFill>
                 <a:latin typeface="Amiri" pitchFamily="2" charset="-78"/>
+                <a:ea typeface="Amiri" pitchFamily="2" charset="-78"/>
                 <a:cs typeface="Amiri" pitchFamily="2" charset="-78"/>
               </a:rPr>
               <a:t>الوَظِيفَةُ المَطْلُوبَةُ</a:t>
@@ -21517,6 +21638,7 @@
                   <a:srgbClr val="1B3B6F"/>
                 </a:solidFill>
                 <a:latin typeface="Amiri" pitchFamily="2" charset="-78"/>
+                <a:ea typeface="Amiri" pitchFamily="2" charset="-78"/>
                 <a:cs typeface="Amiri" pitchFamily="2" charset="-78"/>
               </a:rPr>
               <a:t>الشَّهَادَةُ الثَّانَوِيَّةُ (قَيْدَ الدِّرَاسَةِ)</a:t>
@@ -21555,6 +21677,7 @@
                   <a:srgbClr val="1B3B6F"/>
                 </a:solidFill>
                 <a:latin typeface="Amiri" pitchFamily="2" charset="-78"/>
+                <a:ea typeface="Amiri" pitchFamily="2" charset="-78"/>
                 <a:cs typeface="Amiri" pitchFamily="2" charset="-78"/>
               </a:rPr>
               <a:t>المُؤَهِّلَاتُ</a:t>
@@ -21696,6 +21819,7 @@
                   <a:srgbClr val="1B3B6F"/>
                 </a:solidFill>
                 <a:latin typeface="Amiri" pitchFamily="2" charset="-78"/>
+                <a:ea typeface="Amiri" pitchFamily="2" charset="-78"/>
                 <a:cs typeface="Amiri" pitchFamily="2" charset="-78"/>
               </a:rPr>
               <a:t>مُتَطَوِّعٌ فِي مَكْتَبَةِ المَدْرَسَةِ</a:t>
@@ -21734,6 +21858,7 @@
                   <a:srgbClr val="1B3B6F"/>
                 </a:solidFill>
                 <a:latin typeface="Amiri" pitchFamily="2" charset="-78"/>
+                <a:ea typeface="Amiri" pitchFamily="2" charset="-78"/>
                 <a:cs typeface="Amiri" pitchFamily="2" charset="-78"/>
               </a:rPr>
               <a:t>الخِبْرَةُ السَّابِقَةُ</a:t>
@@ -21875,6 +22000,7 @@
                   <a:srgbClr val="1B3B6F"/>
                 </a:solidFill>
                 <a:latin typeface="Amiri" pitchFamily="2" charset="-78"/>
+                <a:ea typeface="Amiri" pitchFamily="2" charset="-78"/>
                 <a:cs typeface="Amiri" pitchFamily="2" charset="-78"/>
               </a:rPr>
               <a:t>الإِنْجْلِيزِيَّةُ وَالعَرَبِيَّةُ</a:t>
@@ -21913,6 +22039,7 @@
                   <a:srgbClr val="1B3B6F"/>
                 </a:solidFill>
                 <a:latin typeface="Amiri" pitchFamily="2" charset="-78"/>
+                <a:ea typeface="Amiri" pitchFamily="2" charset="-78"/>
                 <a:cs typeface="Amiri" pitchFamily="2" charset="-78"/>
               </a:rPr>
               <a:t>اللُّغَاتُ</a:t>
@@ -22054,6 +22181,7 @@
                   <a:srgbClr val="1B3B6F"/>
                 </a:solidFill>
                 <a:latin typeface="Amiri" pitchFamily="2" charset="-78"/>
+                <a:ea typeface="Amiri" pitchFamily="2" charset="-78"/>
                 <a:cs typeface="Amiri" pitchFamily="2" charset="-78"/>
               </a:rPr>
               <a:t>السَّيِّدَةُ مَرْيَمُ، أَمِينَةُ المَكْتَبَةِ</a:t>
@@ -22092,6 +22220,7 @@
                   <a:srgbClr val="1B3B6F"/>
                 </a:solidFill>
                 <a:latin typeface="Amiri" pitchFamily="2" charset="-78"/>
+                <a:ea typeface="Amiri" pitchFamily="2" charset="-78"/>
                 <a:cs typeface="Amiri" pitchFamily="2" charset="-78"/>
               </a:rPr>
               <a:t>اسْمُ المُوصِي</a:t>
@@ -22233,6 +22362,7 @@
                   <a:srgbClr val="1B3B6F"/>
                 </a:solidFill>
                 <a:latin typeface="Amiri" pitchFamily="2" charset="-78"/>
+                <a:ea typeface="Amiri" pitchFamily="2" charset="-78"/>
                 <a:cs typeface="Amiri" pitchFamily="2" charset="-78"/>
               </a:rPr>
               <a:t>نَظَّمْتُ نَادِيًا لِلْقِرَاءَةِ، وَأَدَرْتُهُ كُلَّ أُسْبُوعٍ لِمُدَّةِ سَنَةٍ.</a:t>
@@ -22271,6 +22401,7 @@
                   <a:srgbClr val="1B3B6F"/>
                 </a:solidFill>
                 <a:latin typeface="Amiri" pitchFamily="2" charset="-78"/>
+                <a:ea typeface="Amiri" pitchFamily="2" charset="-78"/>
                 <a:cs typeface="Amiri" pitchFamily="2" charset="-78"/>
               </a:rPr>
               <a:t>جُمْلَةٌ: مَاذَا فَعَلْتَ فِي عَمَلِكَ السَّابِقِ؟</a:t>
@@ -22480,6 +22611,7 @@
                   <a:srgbClr val="D4AF37"/>
                 </a:solidFill>
                 <a:latin typeface="Amiri" pitchFamily="2" charset="-78"/>
+                <a:ea typeface="Amiri" pitchFamily="2" charset="-78"/>
                 <a:cs typeface="Amiri" pitchFamily="2" charset="-78"/>
               </a:rPr>
               <a:t>م</a:t>
@@ -22800,6 +22932,7 @@
                   <a:srgbClr val="8A6D1E"/>
                 </a:solidFill>
                 <a:latin typeface="Amiri" pitchFamily="2" charset="-78"/>
+                <a:ea typeface="Amiri" pitchFamily="2" charset="-78"/>
                 <a:cs typeface="Amiri" pitchFamily="2" charset="-78"/>
               </a:rPr>
               <a:t>رِسَالَةُ طَلَبِ وَظِيفَةٍ</a:t>
@@ -23275,6 +23408,7 @@
                   <a:srgbClr val="1B3B6F"/>
                 </a:solidFill>
                 <a:latin typeface="Amiri" pitchFamily="2" charset="-78"/>
+                <a:ea typeface="Amiri" pitchFamily="2" charset="-78"/>
                 <a:cs typeface="Amiri" pitchFamily="2" charset="-78"/>
               </a:rPr>
               <a:t>أَوَدُّ أَنْ أَتَقَدَّمَ لِوَظِيفَةِ …</a:t>
@@ -23351,6 +23485,7 @@
                   <a:srgbClr val="1B3B6F"/>
                 </a:solidFill>
                 <a:latin typeface="Amiri" pitchFamily="2" charset="-78"/>
+                <a:ea typeface="Amiri" pitchFamily="2" charset="-78"/>
                 <a:cs typeface="Amiri" pitchFamily="2" charset="-78"/>
               </a:rPr>
               <a:t>عَمِلْتُ فِي … وَكُنْتُ أُرَتِّبُ … وَأُسَاعِدُ …</a:t>
@@ -23427,6 +23562,7 @@
                   <a:srgbClr val="1B3B6F"/>
                 </a:solidFill>
                 <a:latin typeface="Amiri" pitchFamily="2" charset="-78"/>
+                <a:ea typeface="Amiri" pitchFamily="2" charset="-78"/>
                 <a:cs typeface="Amiri" pitchFamily="2" charset="-78"/>
               </a:rPr>
               <a:t>هَلْ يُمْكِنُنِي أَنْ أَسْأَلَ عَنْ …؟</a:t>
@@ -23503,6 +23639,7 @@
                   <a:srgbClr val="1B3B6F"/>
                 </a:solidFill>
                 <a:latin typeface="Amiri" pitchFamily="2" charset="-78"/>
+                <a:ea typeface="Amiri" pitchFamily="2" charset="-78"/>
                 <a:cs typeface="Amiri" pitchFamily="2" charset="-78"/>
               </a:rPr>
               <a:t>سَأُرْسِلُ لَكُمْ سِيرَتِي الذَّاتِيَّةَ</a:t>
@@ -23674,6 +23811,7 @@
                   <a:srgbClr val="D4AF37"/>
                 </a:solidFill>
                 <a:latin typeface="Amiri" pitchFamily="2" charset="-78"/>
+                <a:ea typeface="Amiri" pitchFamily="2" charset="-78"/>
                 <a:cs typeface="Amiri" pitchFamily="2" charset="-78"/>
               </a:rPr>
               <a:t>م</a:t>
@@ -23994,6 +24132,7 @@
                   <a:srgbClr val="8A6D1E"/>
                 </a:solidFill>
                 <a:latin typeface="Amiri" pitchFamily="2" charset="-78"/>
+                <a:ea typeface="Amiri" pitchFamily="2" charset="-78"/>
                 <a:cs typeface="Amiri" pitchFamily="2" charset="-78"/>
               </a:rPr>
               <a:t>نَصُّ السُّؤَالِ</a:t>
@@ -24274,6 +24413,7 @@
                   <a:srgbClr val="1B3B6F"/>
                 </a:solidFill>
                 <a:latin typeface="Amiri" pitchFamily="2" charset="-78"/>
+                <a:ea typeface="Amiri" pitchFamily="2" charset="-78"/>
                 <a:cs typeface="Amiri" pitchFamily="2" charset="-78"/>
               </a:rPr>
               <a:t>رَأَيْتَ إِعْلَانًا عَنْ وَظِيفَةٍ فِي مَكْتَبَةِ المَدِينَةِ. اكْتُبْ رِسَالَةً رَسْمِيَّةً (٨٠–٩٠ كَلِمَةً).</a:t>
@@ -24415,6 +24555,7 @@
                   <a:srgbClr val="1B3B6F"/>
                 </a:solidFill>
                 <a:latin typeface="Amiri" pitchFamily="2" charset="-78"/>
+                <a:ea typeface="Amiri" pitchFamily="2" charset="-78"/>
                 <a:cs typeface="Amiri" pitchFamily="2" charset="-78"/>
               </a:rPr>
               <a:t>لِأَيِّ وَظِيفَةٍ تَتَقَدَّمُ؟ وَمَنْ أَنْتَ؟</a:t>
@@ -24556,6 +24697,7 @@
                   <a:srgbClr val="1B3B6F"/>
                 </a:solidFill>
                 <a:latin typeface="Amiri" pitchFamily="2" charset="-78"/>
+                <a:ea typeface="Amiri" pitchFamily="2" charset="-78"/>
                 <a:cs typeface="Amiri" pitchFamily="2" charset="-78"/>
               </a:rPr>
               <a:t>مَا صِفَاتُكَ؟</a:t>
@@ -24697,6 +24839,7 @@
                   <a:srgbClr val="1B3B6F"/>
                 </a:solidFill>
                 <a:latin typeface="Amiri" pitchFamily="2" charset="-78"/>
+                <a:ea typeface="Amiri" pitchFamily="2" charset="-78"/>
                 <a:cs typeface="Amiri" pitchFamily="2" charset="-78"/>
               </a:rPr>
               <a:t>مَا خِبْرَتُكَ السَّابِقَةُ؟</a:t>
@@ -24838,6 +24981,7 @@
                   <a:srgbClr val="1B3B6F"/>
                 </a:solidFill>
                 <a:latin typeface="Amiri" pitchFamily="2" charset="-78"/>
+                <a:ea typeface="Amiri" pitchFamily="2" charset="-78"/>
                 <a:cs typeface="Amiri" pitchFamily="2" charset="-78"/>
               </a:rPr>
               <a:t>لِمَاذَا تُرِيدُ الوَظِيفَةَ؟ اسْأَلْ سُؤَالًا، وَقُلْ مَاذَا تُرْسِلُ مَعَ الرِّسَالَةِ.</a:t>
@@ -25047,6 +25191,7 @@
                   <a:srgbClr val="D4AF37"/>
                 </a:solidFill>
                 <a:latin typeface="Amiri" pitchFamily="2" charset="-78"/>
+                <a:ea typeface="Amiri" pitchFamily="2" charset="-78"/>
                 <a:cs typeface="Amiri" pitchFamily="2" charset="-78"/>
               </a:rPr>
               <a:t>م</a:t>
@@ -25367,6 +25512,7 @@
                   <a:srgbClr val="8A6D1E"/>
                 </a:solidFill>
                 <a:latin typeface="Amiri" pitchFamily="2" charset="-78"/>
+                <a:ea typeface="Amiri" pitchFamily="2" charset="-78"/>
                 <a:cs typeface="Amiri" pitchFamily="2" charset="-78"/>
               </a:rPr>
               <a:t>قَوَالِبُ الكِتَابَةِ</a:t>
@@ -25647,6 +25793,7 @@
                   <a:srgbClr val="1B3B6F"/>
                 </a:solidFill>
                 <a:latin typeface="Amiri" pitchFamily="2" charset="-78"/>
+                <a:ea typeface="Amiri" pitchFamily="2" charset="-78"/>
                 <a:cs typeface="Amiri" pitchFamily="2" charset="-78"/>
               </a:rPr>
               <a:t>إِلَى مُدِيرِ مَكْتَبَةِ المَدِينَةِ،</a:t>
@@ -25853,6 +26000,7 @@
                   <a:srgbClr val="1B3B6F"/>
                 </a:solidFill>
                 <a:latin typeface="Amiri" pitchFamily="2" charset="-78"/>
+                <a:ea typeface="Amiri" pitchFamily="2" charset="-78"/>
                 <a:cs typeface="Amiri" pitchFamily="2" charset="-78"/>
               </a:rPr>
               <a:t>أَوَدُّ أَنْ أَتَقَدَّمَ لِوَظِيفَةِ ______ . اسْمِي ______ .</a:t>
@@ -26059,6 +26207,7 @@
                   <a:srgbClr val="1B3B6F"/>
                 </a:solidFill>
                 <a:latin typeface="Amiri" pitchFamily="2" charset="-78"/>
+                <a:ea typeface="Amiri" pitchFamily="2" charset="-78"/>
                 <a:cs typeface="Amiri" pitchFamily="2" charset="-78"/>
               </a:rPr>
               <a:t>أَنَا ______ وَ______ .</a:t>
@@ -26265,6 +26414,7 @@
                   <a:srgbClr val="1B3B6F"/>
                 </a:solidFill>
                 <a:latin typeface="Amiri" pitchFamily="2" charset="-78"/>
+                <a:ea typeface="Amiri" pitchFamily="2" charset="-78"/>
                 <a:cs typeface="Amiri" pitchFamily="2" charset="-78"/>
               </a:rPr>
               <a:t>فِي الصَّيْفِ المَاضِي عَمِلْتُ فِي ______ ، وَكُنْتُ ______ .</a:t>
@@ -26471,6 +26621,7 @@
                   <a:srgbClr val="1B3B6F"/>
                 </a:solidFill>
                 <a:latin typeface="Amiri" pitchFamily="2" charset="-78"/>
+                <a:ea typeface="Amiri" pitchFamily="2" charset="-78"/>
                 <a:cs typeface="Amiri" pitchFamily="2" charset="-78"/>
               </a:rPr>
               <a:t>أُرِيدُ الوَظِيفَةَ لِأَنَّ ______ . هَلْ يُمْكِنُنِي أَنْ ______ ؟</a:t>
@@ -26677,6 +26828,7 @@
                   <a:srgbClr val="1B3B6F"/>
                 </a:solidFill>
                 <a:latin typeface="Amiri" pitchFamily="2" charset="-78"/>
+                <a:ea typeface="Amiri" pitchFamily="2" charset="-78"/>
                 <a:cs typeface="Amiri" pitchFamily="2" charset="-78"/>
               </a:rPr>
               <a:t>مَعَ الشُّكْرِ، ______</a:t>
@@ -26916,13 +27068,9 @@
     <a:fontScheme name="Office">
       <a:majorFont>
         <a:latin typeface="Calibri Light" panose="020F0302020204030204"/>
-        <a:ea typeface=""/>
-        <a:cs typeface=""/>
-        <a:font script="Jpan" typeface="游ゴシック Light"/>
-        <a:font script="Hang" typeface="맑은 고딕"/>
-        <a:font script="Hans" typeface="等线 Light"/>
-        <a:font script="Hant" typeface="新細明體"/>
-        <a:font script="Arab" typeface="Times New Roman"/>
+        <a:ea typeface="Amiri" pitchFamily="2" charset="-78"/>
+        <a:cs typeface="Amiri" pitchFamily="2" charset="-78"/>
+        <a:font script="Arab" typeface="Amiri"/>
         <a:font script="Hebr" typeface="Times New Roman"/>
         <a:font script="Thai" typeface="Angsana New"/>
         <a:font script="Ethi" typeface="Nyala"/>
@@ -26968,13 +27116,9 @@
       </a:majorFont>
       <a:minorFont>
         <a:latin typeface="Calibri" panose="020F0502020204030204"/>
-        <a:ea typeface=""/>
-        <a:cs typeface=""/>
-        <a:font script="Jpan" typeface="游ゴシック"/>
-        <a:font script="Hang" typeface="맑은 고딕"/>
-        <a:font script="Hans" typeface="等线"/>
-        <a:font script="Hant" typeface="新細明體"/>
-        <a:font script="Arab" typeface="Arial"/>
+        <a:ea typeface="Amiri" pitchFamily="2" charset="-78"/>
+        <a:cs typeface="Amiri" pitchFamily="2" charset="-78"/>
+        <a:font script="Arab" typeface="Amiri"/>
         <a:font script="Hebr" typeface="Arial"/>
         <a:font script="Thai" typeface="Cordia New"/>
         <a:font script="Ethi" typeface="Nyala"/>

--- a/Topic_D/Exam_Practice/TD-L09_Writing_Workshop_Applications_and_Interviews.pptx
+++ b/Topic_D/Exam_Practice/TD-L09_Writing_Workshop_Applications_and_Interviews.pptx
@@ -3848,7 +3848,7 @@
                 <a:solidFill>
                   <a:srgbClr val="FFFFFF"/>
                 </a:solidFill>
-                <a:latin typeface="Calibri" pitchFamily="34" charset="0"/>
+                <a:latin typeface="Amiri" pitchFamily="2" charset="-78"/>
                 <a:ea typeface="Amiri" pitchFamily="2" charset="-78"/>
                 <a:cs typeface="Amiri" pitchFamily="2" charset="-78"/>
               </a:rPr>
@@ -3914,7 +3914,7 @@
                 <a:solidFill>
                   <a:srgbClr val="FFFFFF"/>
                 </a:solidFill>
-                <a:latin typeface="Calibri" pitchFamily="34" charset="0"/>
+                <a:latin typeface="Amiri" pitchFamily="2" charset="-78"/>
                 <a:ea typeface="Amiri" pitchFamily="2" charset="-78"/>
                 <a:cs typeface="Amiri" pitchFamily="2" charset="-78"/>
               </a:rPr>
@@ -3980,7 +3980,7 @@
                 <a:solidFill>
                   <a:srgbClr val="FFFFFF"/>
                 </a:solidFill>
-                <a:latin typeface="Calibri" pitchFamily="34" charset="0"/>
+                <a:latin typeface="Amiri" pitchFamily="2" charset="-78"/>
                 <a:ea typeface="Amiri" pitchFamily="2" charset="-78"/>
                 <a:cs typeface="Amiri" pitchFamily="2" charset="-78"/>
               </a:rPr>
@@ -4046,7 +4046,7 @@
                 <a:solidFill>
                   <a:srgbClr val="FFFFFF"/>
                 </a:solidFill>
-                <a:latin typeface="Calibri" pitchFamily="34" charset="0"/>
+                <a:latin typeface="Amiri" pitchFamily="2" charset="-78"/>
                 <a:ea typeface="Amiri" pitchFamily="2" charset="-78"/>
                 <a:cs typeface="Amiri" pitchFamily="2" charset="-78"/>
               </a:rPr>
@@ -4844,7 +4844,7 @@
                 <a:solidFill>
                   <a:srgbClr val="FFFFFF"/>
                 </a:solidFill>
-                <a:latin typeface="Calibri" pitchFamily="34" charset="0"/>
+                <a:latin typeface="Amiri" pitchFamily="2" charset="-78"/>
                 <a:ea typeface="Amiri" pitchFamily="2" charset="-78"/>
                 <a:cs typeface="Amiri" pitchFamily="2" charset="-78"/>
               </a:rPr>
@@ -4910,7 +4910,7 @@
                 <a:solidFill>
                   <a:srgbClr val="FFFFFF"/>
                 </a:solidFill>
-                <a:latin typeface="Calibri" pitchFamily="34" charset="0"/>
+                <a:latin typeface="Amiri" pitchFamily="2" charset="-78"/>
                 <a:ea typeface="Amiri" pitchFamily="2" charset="-78"/>
                 <a:cs typeface="Amiri" pitchFamily="2" charset="-78"/>
               </a:rPr>
@@ -4976,7 +4976,7 @@
                 <a:solidFill>
                   <a:srgbClr val="FFFFFF"/>
                 </a:solidFill>
-                <a:latin typeface="Calibri" pitchFamily="34" charset="0"/>
+                <a:latin typeface="Amiri" pitchFamily="2" charset="-78"/>
                 <a:ea typeface="Amiri" pitchFamily="2" charset="-78"/>
                 <a:cs typeface="Amiri" pitchFamily="2" charset="-78"/>
               </a:rPr>
@@ -5042,7 +5042,7 @@
                 <a:solidFill>
                   <a:srgbClr val="FFFFFF"/>
                 </a:solidFill>
-                <a:latin typeface="Calibri" pitchFamily="34" charset="0"/>
+                <a:latin typeface="Amiri" pitchFamily="2" charset="-78"/>
                 <a:ea typeface="Amiri" pitchFamily="2" charset="-78"/>
                 <a:cs typeface="Amiri" pitchFamily="2" charset="-78"/>
               </a:rPr>
@@ -8602,7 +8602,7 @@
                 <a:solidFill>
                   <a:srgbClr val="FFFFFF"/>
                 </a:solidFill>
-                <a:latin typeface="Calibri" pitchFamily="34" charset="0"/>
+                <a:latin typeface="Amiri" pitchFamily="2" charset="-78"/>
                 <a:ea typeface="Amiri" pitchFamily="2" charset="-78"/>
                 <a:cs typeface="Amiri" pitchFamily="2" charset="-78"/>
               </a:rPr>
@@ -8668,7 +8668,7 @@
                 <a:solidFill>
                   <a:srgbClr val="FFFFFF"/>
                 </a:solidFill>
-                <a:latin typeface="Calibri" pitchFamily="34" charset="0"/>
+                <a:latin typeface="Amiri" pitchFamily="2" charset="-78"/>
                 <a:ea typeface="Amiri" pitchFamily="2" charset="-78"/>
                 <a:cs typeface="Amiri" pitchFamily="2" charset="-78"/>
               </a:rPr>
@@ -8734,7 +8734,7 @@
                 <a:solidFill>
                   <a:srgbClr val="FFFFFF"/>
                 </a:solidFill>
-                <a:latin typeface="Calibri" pitchFamily="34" charset="0"/>
+                <a:latin typeface="Amiri" pitchFamily="2" charset="-78"/>
                 <a:ea typeface="Amiri" pitchFamily="2" charset="-78"/>
                 <a:cs typeface="Amiri" pitchFamily="2" charset="-78"/>
               </a:rPr>
@@ -8800,7 +8800,7 @@
                 <a:solidFill>
                   <a:srgbClr val="FFFFFF"/>
                 </a:solidFill>
-                <a:latin typeface="Calibri" pitchFamily="34" charset="0"/>
+                <a:latin typeface="Amiri" pitchFamily="2" charset="-78"/>
                 <a:ea typeface="Amiri" pitchFamily="2" charset="-78"/>
                 <a:cs typeface="Amiri" pitchFamily="2" charset="-78"/>
               </a:rPr>
@@ -9587,7 +9587,7 @@
                 <a:solidFill>
                   <a:srgbClr val="FFFFFF"/>
                 </a:solidFill>
-                <a:latin typeface="Calibri" pitchFamily="34" charset="0"/>
+                <a:latin typeface="Amiri" pitchFamily="2" charset="-78"/>
                 <a:ea typeface="Amiri" pitchFamily="2" charset="-78"/>
                 <a:cs typeface="Amiri" pitchFamily="2" charset="-78"/>
               </a:rPr>
@@ -9653,7 +9653,7 @@
                 <a:solidFill>
                   <a:srgbClr val="FFFFFF"/>
                 </a:solidFill>
-                <a:latin typeface="Calibri" pitchFamily="34" charset="0"/>
+                <a:latin typeface="Amiri" pitchFamily="2" charset="-78"/>
                 <a:ea typeface="Amiri" pitchFamily="2" charset="-78"/>
                 <a:cs typeface="Amiri" pitchFamily="2" charset="-78"/>
               </a:rPr>
@@ -9719,7 +9719,7 @@
                 <a:solidFill>
                   <a:srgbClr val="FFFFFF"/>
                 </a:solidFill>
-                <a:latin typeface="Calibri" pitchFamily="34" charset="0"/>
+                <a:latin typeface="Amiri" pitchFamily="2" charset="-78"/>
                 <a:ea typeface="Amiri" pitchFamily="2" charset="-78"/>
                 <a:cs typeface="Amiri" pitchFamily="2" charset="-78"/>
               </a:rPr>
@@ -9785,7 +9785,7 @@
                 <a:solidFill>
                   <a:srgbClr val="FFFFFF"/>
                 </a:solidFill>
-                <a:latin typeface="Calibri" pitchFamily="34" charset="0"/>
+                <a:latin typeface="Amiri" pitchFamily="2" charset="-78"/>
                 <a:ea typeface="Amiri" pitchFamily="2" charset="-78"/>
                 <a:cs typeface="Amiri" pitchFamily="2" charset="-78"/>
               </a:rPr>
@@ -10572,7 +10572,7 @@
                 <a:solidFill>
                   <a:srgbClr val="FFFFFF"/>
                 </a:solidFill>
-                <a:latin typeface="Calibri" pitchFamily="34" charset="0"/>
+                <a:latin typeface="Amiri" pitchFamily="2" charset="-78"/>
                 <a:ea typeface="Amiri" pitchFamily="2" charset="-78"/>
                 <a:cs typeface="Amiri" pitchFamily="2" charset="-78"/>
               </a:rPr>
@@ -10638,7 +10638,7 @@
                 <a:solidFill>
                   <a:srgbClr val="FFFFFF"/>
                 </a:solidFill>
-                <a:latin typeface="Calibri" pitchFamily="34" charset="0"/>
+                <a:latin typeface="Amiri" pitchFamily="2" charset="-78"/>
                 <a:ea typeface="Amiri" pitchFamily="2" charset="-78"/>
                 <a:cs typeface="Amiri" pitchFamily="2" charset="-78"/>
               </a:rPr>
@@ -10704,7 +10704,7 @@
                 <a:solidFill>
                   <a:srgbClr val="FFFFFF"/>
                 </a:solidFill>
-                <a:latin typeface="Calibri" pitchFamily="34" charset="0"/>
+                <a:latin typeface="Amiri" pitchFamily="2" charset="-78"/>
                 <a:ea typeface="Amiri" pitchFamily="2" charset="-78"/>
                 <a:cs typeface="Amiri" pitchFamily="2" charset="-78"/>
               </a:rPr>
@@ -10770,7 +10770,7 @@
                 <a:solidFill>
                   <a:srgbClr val="FFFFFF"/>
                 </a:solidFill>
-                <a:latin typeface="Calibri" pitchFamily="34" charset="0"/>
+                <a:latin typeface="Amiri" pitchFamily="2" charset="-78"/>
                 <a:ea typeface="Amiri" pitchFamily="2" charset="-78"/>
                 <a:cs typeface="Amiri" pitchFamily="2" charset="-78"/>
               </a:rPr>
